--- a/public/templates/product.pptx
+++ b/public/templates/product.pptx
@@ -26,8 +26,9 @@
     </p:embeddedFont>
     <p:embeddedFont>
       <p:font typeface="Montserrat" charset="0"/>
-      <p:bold r:id="rId9"/>
-      <p:boldItalic r:id="rId10"/>
+      <p:regular r:id="rId9"/>
+      <p:bold r:id="rId10"/>
+      <p:boldItalic r:id="rId11"/>
     </p:embeddedFont>
   </p:embeddedFontLst>
   <p:defaultTextStyle>
@@ -261,7 +262,7 @@
   </p:defaultTextStyle>
   <p:extLst>
     <p:ext uri="{EFAFB233-063F-42B5-8137-9DF3F51BA10A}">
-      <p15:sldGuideLst xmlns:ahyp="http://schemas.microsoft.com/office/drawing/2018/hyperlinkcolor" xmlns:p15="http://schemas.microsoft.com/office/powerpoint/2012/main" xmlns:p14="http://schemas.microsoft.com/office/powerpoint/2010/main" xmlns:com="http://schemas.openxmlformats.org/drawingml/2006/compatibility" xmlns:pvml="urn:schemas-microsoft-com:office:powerpoint" xmlns:v="urn:schemas-microsoft-com:vml" xmlns:o="urn:schemas-microsoft-com:office:office" xmlns:dgm="http://schemas.openxmlformats.org/drawingml/2006/diagram" xmlns:c="http://schemas.openxmlformats.org/drawingml/2006/chart" xmlns:mv="urn:schemas-microsoft-com:mac:vml" xmlns:mc="http://schemas.openxmlformats.org/markup-compatibility/2006" xmlns="">
+      <p15:sldGuideLst xmlns="" xmlns:mc="http://schemas.openxmlformats.org/markup-compatibility/2006" xmlns:mv="urn:schemas-microsoft-com:mac:vml" xmlns:c="http://schemas.openxmlformats.org/drawingml/2006/chart" xmlns:dgm="http://schemas.openxmlformats.org/drawingml/2006/diagram" xmlns:o="urn:schemas-microsoft-com:office:office" xmlns:v="urn:schemas-microsoft-com:vml" xmlns:pvml="urn:schemas-microsoft-com:office:powerpoint" xmlns:com="http://schemas.openxmlformats.org/drawingml/2006/compatibility" xmlns:p14="http://schemas.microsoft.com/office/powerpoint/2010/main" xmlns:p15="http://schemas.microsoft.com/office/powerpoint/2012/main" xmlns:ahyp="http://schemas.microsoft.com/office/drawing/2018/hyperlinkcolor">
         <p15:guide id="1" orient="horz" pos="2160">
           <p15:clr>
             <a:srgbClr val="000000"/>
@@ -8942,7 +8943,7 @@
               </a:pPr>
               <a:endParaRPr sz="1800" b="0" i="0" u="none" strike="noStrike" cap="none">
                 <a:solidFill>
-                  <a:schemeClr val="dk1"/>
+                  <a:schemeClr val="bg1"/>
                 </a:solidFill>
                 <a:latin typeface="Calibri"/>
                 <a:ea typeface="Calibri"/>
@@ -8969,7 +8970,7 @@
         </p:blipFill>
         <p:spPr>
           <a:xfrm>
-            <a:off x="10459300" y="1429925"/>
+            <a:off x="11034472" y="1105469"/>
             <a:ext cx="7382501" cy="6955790"/>
           </a:xfrm>
           <a:prstGeom prst="rect">
@@ -9120,7 +9121,7 @@
         </p:blipFill>
         <p:spPr>
           <a:xfrm>
-            <a:off x="5538813" y="-364250"/>
+            <a:off x="5538813" y="-128282"/>
             <a:ext cx="2527357" cy="1098850"/>
           </a:xfrm>
           <a:prstGeom prst="rect">
@@ -9148,7 +9149,7 @@
         </p:blipFill>
         <p:spPr>
           <a:xfrm>
-            <a:off x="15544925" y="9655075"/>
+            <a:off x="15544925" y="9345367"/>
             <a:ext cx="2527357" cy="1098850"/>
           </a:xfrm>
           <a:prstGeom prst="rect">
